--- a/samples/13_slides.pptx
+++ b/samples/13_slides.pptx
@@ -63,6 +63,17 @@
             <a:r>
               <a:rPr lang="ja-JP"/>
               <a:t>私は学生です</a:t>
+            </a:r>
+          </a:p>
+          <a:p>
+            <a:r>
+              <a:rPr lang="ja-JP"/>
+              <a:t/>
+            </a:r>
+            <a:br/>
+            <a:r>
+              <a:rPr lang="ja-JP"/>
+              <a:t>東京</a:t>
             </a:r>
           </a:p>
         </p:txBody>
